--- a/docs/주간보고/AI활용_개발공정_지침서_보고용.pptx
+++ b/docs/주간보고/AI활용_개발공정_지침서_보고용.pptx
@@ -5,15 +5,17 @@
     <p:sldMasterId id="2147483648" r:id="rId1"/>
   </p:sldMasterIdLst>
   <p:notesMasterIdLst>
-    <p:notesMasterId r:id="rId8"/>
+    <p:notesMasterId r:id="rId10"/>
   </p:notesMasterIdLst>
   <p:sldIdLst>
-    <p:sldId id="256" r:id="rId2"/>
-    <p:sldId id="257" r:id="rId3"/>
-    <p:sldId id="258" r:id="rId4"/>
-    <p:sldId id="259" r:id="rId5"/>
-    <p:sldId id="260" r:id="rId6"/>
-    <p:sldId id="261" r:id="rId7"/>
+    <p:sldId id="262" r:id="rId2"/>
+    <p:sldId id="256" r:id="rId3"/>
+    <p:sldId id="257" r:id="rId4"/>
+    <p:sldId id="258" r:id="rId5"/>
+    <p:sldId id="259" r:id="rId6"/>
+    <p:sldId id="260" r:id="rId7"/>
+    <p:sldId id="261" r:id="rId8"/>
+    <p:sldId id="263" r:id="rId9"/>
   </p:sldIdLst>
   <p:sldSz cx="12192000" cy="6858000"/>
   <p:notesSz cx="6858000" cy="9144000"/>
@@ -213,7 +215,7 @@
           <a:p>
             <a:fld id="{B03EE2CA-97E0-F840-9D76-41FDD4FAECBB}" type="datetimeFigureOut">
               <a:rPr kumimoji="1" lang="ko-KR" altLang="en-US" smtClean="0"/>
-              <a:t>2026. 8. 11.</a:t>
+              <a:t>2026. 8. 12.</a:t>
             </a:fld>
             <a:endParaRPr kumimoji="1" lang="ko-KR" altLang="en-US"/>
           </a:p>
@@ -545,7 +547,7 @@
           <a:p>
             <a:fld id="{F2A18892-1AFA-4942-8674-000C7DC31785}" type="slidenum">
               <a:rPr kumimoji="1" lang="ko-KR" altLang="en-US" smtClean="0"/>
-              <a:t>6</a:t>
+              <a:t>7</a:t>
             </a:fld>
             <a:endParaRPr kumimoji="1" lang="ko-KR" altLang="en-US"/>
           </a:p>
@@ -555,6 +557,114 @@
     <p:extLst>
       <p:ext uri="{BB962C8B-B14F-4D97-AF65-F5344CB8AC3E}">
         <p14:creationId xmlns:p14="http://schemas.microsoft.com/office/powerpoint/2010/main" val="3169697332"/>
+      </p:ext>
+    </p:extLst>
+  </p:cSld>
+  <p:clrMapOvr>
+    <a:masterClrMapping/>
+  </p:clrMapOvr>
+</p:notes>
+</file>
+
+<file path=ppt/notesSlides/notesSlide2.xml><?xml version="1.0" encoding="utf-8"?>
+<p:notes xmlns:a="http://schemas.openxmlformats.org/drawingml/2006/main" xmlns:r="http://schemas.openxmlformats.org/officeDocument/2006/relationships" xmlns:p="http://schemas.openxmlformats.org/presentationml/2006/main">
+  <p:cSld>
+    <p:spTree>
+      <p:nvGrpSpPr>
+        <p:cNvPr id="1" name="">
+          <a:extLst>
+            <a:ext uri="{FF2B5EF4-FFF2-40B4-BE49-F238E27FC236}">
+              <a16:creationId xmlns:a16="http://schemas.microsoft.com/office/drawing/2014/main" id="{C8EDF901-3F13-1A1C-A6D3-E7A420BFF643}"/>
+            </a:ext>
+          </a:extLst>
+        </p:cNvPr>
+        <p:cNvGrpSpPr/>
+        <p:nvPr/>
+      </p:nvGrpSpPr>
+      <p:grpSpPr>
+        <a:xfrm>
+          <a:off x="0" y="0"/>
+          <a:ext cx="0" cy="0"/>
+          <a:chOff x="0" y="0"/>
+          <a:chExt cx="0" cy="0"/>
+        </a:xfrm>
+      </p:grpSpPr>
+      <p:sp>
+        <p:nvSpPr>
+          <p:cNvPr id="2" name="슬라이드 이미지 개체 틀 1">
+            <a:extLst>
+              <a:ext uri="{FF2B5EF4-FFF2-40B4-BE49-F238E27FC236}">
+                <a16:creationId xmlns:a16="http://schemas.microsoft.com/office/drawing/2014/main" id="{0DB847B1-4EA1-2938-69D9-E66467B3D7F0}"/>
+              </a:ext>
+            </a:extLst>
+          </p:cNvPr>
+          <p:cNvSpPr>
+            <a:spLocks noGrp="1" noRot="1" noChangeAspect="1"/>
+          </p:cNvSpPr>
+          <p:nvPr>
+            <p:ph type="sldImg"/>
+          </p:nvPr>
+        </p:nvSpPr>
+        <p:spPr/>
+      </p:sp>
+      <p:sp>
+        <p:nvSpPr>
+          <p:cNvPr id="3" name="슬라이드 노트 개체 틀 2">
+            <a:extLst>
+              <a:ext uri="{FF2B5EF4-FFF2-40B4-BE49-F238E27FC236}">
+                <a16:creationId xmlns:a16="http://schemas.microsoft.com/office/drawing/2014/main" id="{E4153DFF-5725-FA18-0C20-FAD9315A597D}"/>
+              </a:ext>
+            </a:extLst>
+          </p:cNvPr>
+          <p:cNvSpPr>
+            <a:spLocks noGrp="1"/>
+          </p:cNvSpPr>
+          <p:nvPr>
+            <p:ph type="body" idx="1"/>
+          </p:nvPr>
+        </p:nvSpPr>
+        <p:spPr/>
+        <p:txBody>
+          <a:bodyPr/>
+          <a:lstStyle/>
+          <a:p>
+            <a:endParaRPr kumimoji="1" lang="ko-KR" altLang="en-US" dirty="0"/>
+          </a:p>
+        </p:txBody>
+      </p:sp>
+      <p:sp>
+        <p:nvSpPr>
+          <p:cNvPr id="4" name="슬라이드 번호 개체 틀 3">
+            <a:extLst>
+              <a:ext uri="{FF2B5EF4-FFF2-40B4-BE49-F238E27FC236}">
+                <a16:creationId xmlns:a16="http://schemas.microsoft.com/office/drawing/2014/main" id="{C48DD335-1031-7A67-F8A2-DAAA1CA8DE6A}"/>
+              </a:ext>
+            </a:extLst>
+          </p:cNvPr>
+          <p:cNvSpPr>
+            <a:spLocks noGrp="1"/>
+          </p:cNvSpPr>
+          <p:nvPr>
+            <p:ph type="sldNum" sz="quarter" idx="5"/>
+          </p:nvPr>
+        </p:nvSpPr>
+        <p:spPr/>
+        <p:txBody>
+          <a:bodyPr/>
+          <a:lstStyle/>
+          <a:p>
+            <a:fld id="{F2A18892-1AFA-4942-8674-000C7DC31785}" type="slidenum">
+              <a:rPr kumimoji="1" lang="ko-KR" altLang="en-US" smtClean="0"/>
+              <a:t>8</a:t>
+            </a:fld>
+            <a:endParaRPr kumimoji="1" lang="ko-KR" altLang="en-US"/>
+          </a:p>
+        </p:txBody>
+      </p:sp>
+    </p:spTree>
+    <p:extLst>
+      <p:ext uri="{BB962C8B-B14F-4D97-AF65-F5344CB8AC3E}">
+        <p14:creationId xmlns:p14="http://schemas.microsoft.com/office/powerpoint/2010/main" val="2622458197"/>
       </p:ext>
     </p:extLst>
   </p:cSld>
@@ -743,7 +853,7 @@
           <a:p>
             <a:fld id="{5BCAD085-E8A6-8845-BD4E-CB4CCA059FC4}" type="datetimeFigureOut">
               <a:rPr lang="en-US" smtClean="0"/>
-              <a:t>8/11/26</a:t>
+              <a:t>8/12/26</a:t>
             </a:fld>
             <a:endParaRPr lang="en-US"/>
           </a:p>
@@ -911,7 +1021,7 @@
           <a:p>
             <a:fld id="{5BCAD085-E8A6-8845-BD4E-CB4CCA059FC4}" type="datetimeFigureOut">
               <a:rPr lang="en-US" smtClean="0"/>
-              <a:t>8/11/26</a:t>
+              <a:t>8/12/26</a:t>
             </a:fld>
             <a:endParaRPr lang="en-US"/>
           </a:p>
@@ -1089,7 +1199,7 @@
           <a:p>
             <a:fld id="{5BCAD085-E8A6-8845-BD4E-CB4CCA059FC4}" type="datetimeFigureOut">
               <a:rPr lang="en-US" smtClean="0"/>
-              <a:t>8/11/26</a:t>
+              <a:t>8/12/26</a:t>
             </a:fld>
             <a:endParaRPr lang="en-US"/>
           </a:p>
@@ -1257,7 +1367,7 @@
           <a:p>
             <a:fld id="{5BCAD085-E8A6-8845-BD4E-CB4CCA059FC4}" type="datetimeFigureOut">
               <a:rPr lang="en-US" smtClean="0"/>
-              <a:t>8/11/26</a:t>
+              <a:t>8/12/26</a:t>
             </a:fld>
             <a:endParaRPr lang="en-US"/>
           </a:p>
@@ -1502,7 +1612,7 @@
           <a:p>
             <a:fld id="{5BCAD085-E8A6-8845-BD4E-CB4CCA059FC4}" type="datetimeFigureOut">
               <a:rPr lang="en-US" smtClean="0"/>
-              <a:t>8/11/26</a:t>
+              <a:t>8/12/26</a:t>
             </a:fld>
             <a:endParaRPr lang="en-US"/>
           </a:p>
@@ -1787,7 +1897,7 @@
           <a:p>
             <a:fld id="{5BCAD085-E8A6-8845-BD4E-CB4CCA059FC4}" type="datetimeFigureOut">
               <a:rPr lang="en-US" smtClean="0"/>
-              <a:t>8/11/26</a:t>
+              <a:t>8/12/26</a:t>
             </a:fld>
             <a:endParaRPr lang="en-US"/>
           </a:p>
@@ -2206,7 +2316,7 @@
           <a:p>
             <a:fld id="{5BCAD085-E8A6-8845-BD4E-CB4CCA059FC4}" type="datetimeFigureOut">
               <a:rPr lang="en-US" smtClean="0"/>
-              <a:t>8/11/26</a:t>
+              <a:t>8/12/26</a:t>
             </a:fld>
             <a:endParaRPr lang="en-US"/>
           </a:p>
@@ -2323,7 +2433,7 @@
           <a:p>
             <a:fld id="{5BCAD085-E8A6-8845-BD4E-CB4CCA059FC4}" type="datetimeFigureOut">
               <a:rPr lang="en-US" smtClean="0"/>
-              <a:t>8/11/26</a:t>
+              <a:t>8/12/26</a:t>
             </a:fld>
             <a:endParaRPr lang="en-US"/>
           </a:p>
@@ -2418,7 +2528,7 @@
           <a:p>
             <a:fld id="{5BCAD085-E8A6-8845-BD4E-CB4CCA059FC4}" type="datetimeFigureOut">
               <a:rPr lang="en-US" smtClean="0"/>
-              <a:t>8/11/26</a:t>
+              <a:t>8/12/26</a:t>
             </a:fld>
             <a:endParaRPr lang="en-US"/>
           </a:p>
@@ -2693,7 +2803,7 @@
           <a:p>
             <a:fld id="{5BCAD085-E8A6-8845-BD4E-CB4CCA059FC4}" type="datetimeFigureOut">
               <a:rPr lang="en-US" smtClean="0"/>
-              <a:t>8/11/26</a:t>
+              <a:t>8/12/26</a:t>
             </a:fld>
             <a:endParaRPr lang="en-US"/>
           </a:p>
@@ -2945,7 +3055,7 @@
           <a:p>
             <a:fld id="{5BCAD085-E8A6-8845-BD4E-CB4CCA059FC4}" type="datetimeFigureOut">
               <a:rPr lang="en-US" smtClean="0"/>
-              <a:t>8/11/26</a:t>
+              <a:t>8/12/26</a:t>
             </a:fld>
             <a:endParaRPr lang="en-US"/>
           </a:p>
@@ -3156,7 +3266,7 @@
           <a:p>
             <a:fld id="{5BCAD085-E8A6-8845-BD4E-CB4CCA059FC4}" type="datetimeFigureOut">
               <a:rPr lang="en-US" smtClean="0"/>
-              <a:t>8/11/26</a:t>
+              <a:t>8/12/26</a:t>
             </a:fld>
             <a:endParaRPr lang="en-US"/>
           </a:p>
@@ -3539,6 +3649,306 @@
         </p:nvSpPr>
         <p:spPr>
           <a:xfrm>
+            <a:off x="457200" y="2286000"/>
+            <a:ext cx="11274552" cy="323165"/>
+          </a:xfrm>
+          <a:prstGeom prst="rect">
+            <a:avLst/>
+          </a:prstGeom>
+          <a:noFill/>
+        </p:spPr>
+        <p:txBody>
+          <a:bodyPr wrap="square">
+            <a:spAutoFit/>
+          </a:bodyPr>
+          <a:lstStyle/>
+          <a:p>
+            <a:pPr algn="l"/>
+            <a:r>
+              <a:rPr sz="1500" b="1" dirty="0">
+                <a:solidFill>
+                  <a:srgbClr val="2E75B6"/>
+                </a:solidFill>
+                <a:latin typeface="Paperlogy 4 Regular"/>
+              </a:rPr>
+              <a:t>3TOP · </a:t>
+            </a:r>
+            <a:r>
+              <a:rPr sz="1500" b="1" dirty="0" err="1">
+                <a:solidFill>
+                  <a:srgbClr val="2E75B6"/>
+                </a:solidFill>
+                <a:latin typeface="Paperlogy 4 Regular"/>
+              </a:rPr>
+              <a:t>AI활용</a:t>
+            </a:r>
+            <a:r>
+              <a:rPr sz="1500" b="1" dirty="0">
+                <a:solidFill>
+                  <a:srgbClr val="2E75B6"/>
+                </a:solidFill>
+                <a:latin typeface="Paperlogy 4 Regular"/>
+              </a:rPr>
+              <a:t> </a:t>
+            </a:r>
+            <a:r>
+              <a:rPr sz="1500" b="1" dirty="0" err="1">
+                <a:solidFill>
+                  <a:srgbClr val="2E75B6"/>
+                </a:solidFill>
+                <a:latin typeface="Paperlogy 4 Regular"/>
+              </a:rPr>
+              <a:t>방법론</a:t>
+            </a:r>
+            <a:endParaRPr sz="1500" b="1" dirty="0">
+              <a:solidFill>
+                <a:srgbClr val="2E75B6"/>
+              </a:solidFill>
+              <a:latin typeface="Paperlogy 4 Regular"/>
+            </a:endParaRPr>
+          </a:p>
+        </p:txBody>
+      </p:sp>
+      <p:sp>
+        <p:nvSpPr>
+          <p:cNvPr id="3" name="TextBox 2"/>
+          <p:cNvSpPr txBox="1"/>
+          <p:nvPr/>
+        </p:nvSpPr>
+        <p:spPr>
+          <a:xfrm>
+            <a:off x="457200" y="2650000"/>
+            <a:ext cx="11274552" cy="707886"/>
+          </a:xfrm>
+          <a:prstGeom prst="rect">
+            <a:avLst/>
+          </a:prstGeom>
+          <a:noFill/>
+        </p:spPr>
+        <p:txBody>
+          <a:bodyPr wrap="square">
+            <a:spAutoFit/>
+          </a:bodyPr>
+          <a:lstStyle/>
+          <a:p>
+            <a:pPr algn="l"/>
+            <a:r>
+              <a:rPr sz="4000" b="1" dirty="0">
+                <a:solidFill>
+                  <a:srgbClr val="1F3B57"/>
+                </a:solidFill>
+                <a:latin typeface="Paperlogy 4 Regular"/>
+              </a:rPr>
+              <a:t>AI </a:t>
+            </a:r>
+            <a:r>
+              <a:rPr sz="4000" b="1" dirty="0" err="1">
+                <a:solidFill>
+                  <a:srgbClr val="1F3B57"/>
+                </a:solidFill>
+                <a:latin typeface="Paperlogy 4 Regular"/>
+              </a:rPr>
+              <a:t>활용</a:t>
+            </a:r>
+            <a:r>
+              <a:rPr sz="4000" b="1" dirty="0">
+                <a:solidFill>
+                  <a:srgbClr val="1F3B57"/>
+                </a:solidFill>
+                <a:latin typeface="Paperlogy 4 Regular"/>
+              </a:rPr>
+              <a:t> </a:t>
+            </a:r>
+            <a:r>
+              <a:rPr sz="4000" b="1" dirty="0" err="1">
+                <a:solidFill>
+                  <a:srgbClr val="1F3B57"/>
+                </a:solidFill>
+                <a:latin typeface="Paperlogy 4 Regular"/>
+              </a:rPr>
+              <a:t>개발</a:t>
+            </a:r>
+            <a:r>
+              <a:rPr sz="4000" b="1" dirty="0">
+                <a:solidFill>
+                  <a:srgbClr val="1F3B57"/>
+                </a:solidFill>
+                <a:latin typeface="Paperlogy 4 Regular"/>
+              </a:rPr>
+              <a:t> </a:t>
+            </a:r>
+            <a:r>
+              <a:rPr sz="4000" b="1" dirty="0" err="1">
+                <a:solidFill>
+                  <a:srgbClr val="1F3B57"/>
+                </a:solidFill>
+                <a:latin typeface="Paperlogy 4 Regular"/>
+              </a:rPr>
+              <a:t>지침서</a:t>
+            </a:r>
+            <a:endParaRPr sz="4000" b="1" dirty="0">
+              <a:solidFill>
+                <a:srgbClr val="1F3B57"/>
+              </a:solidFill>
+              <a:latin typeface="Paperlogy 4 Regular"/>
+            </a:endParaRPr>
+          </a:p>
+        </p:txBody>
+      </p:sp>
+      <p:sp>
+        <p:nvSpPr>
+          <p:cNvPr id="4" name="Rectangle 3"/>
+          <p:cNvSpPr/>
+          <p:nvPr/>
+        </p:nvSpPr>
+        <p:spPr>
+          <a:xfrm>
+            <a:off x="457200" y="3650000"/>
+            <a:ext cx="1143000" cy="30480"/>
+          </a:xfrm>
+          <a:prstGeom prst="rect">
+            <a:avLst/>
+          </a:prstGeom>
+          <a:solidFill>
+            <a:srgbClr val="2E75B6"/>
+          </a:solidFill>
+          <a:ln>
+            <a:noFill/>
+          </a:ln>
+          <a:effectLst/>
+        </p:spPr>
+        <p:style>
+          <a:lnRef idx="1">
+            <a:schemeClr val="accent1"/>
+          </a:lnRef>
+          <a:fillRef idx="3">
+            <a:schemeClr val="accent1"/>
+          </a:fillRef>
+          <a:effectRef idx="2">
+            <a:schemeClr val="accent1"/>
+          </a:effectRef>
+          <a:fontRef idx="minor">
+            <a:schemeClr val="lt1"/>
+          </a:fontRef>
+        </p:style>
+        <p:txBody>
+          <a:bodyPr rtlCol="0" anchor="ctr"/>
+          <a:lstStyle/>
+          <a:p>
+            <a:pPr algn="ctr"/>
+            <a:endParaRPr/>
+          </a:p>
+        </p:txBody>
+      </p:sp>
+      <p:sp>
+        <p:nvSpPr>
+          <p:cNvPr id="5" name="TextBox 4"/>
+          <p:cNvSpPr txBox="1"/>
+          <p:nvPr/>
+        </p:nvSpPr>
+        <p:spPr>
+          <a:xfrm>
+            <a:off x="457200" y="3780000"/>
+            <a:ext cx="11274552" cy="400000"/>
+          </a:xfrm>
+          <a:prstGeom prst="rect">
+            <a:avLst/>
+          </a:prstGeom>
+          <a:noFill/>
+        </p:spPr>
+        <p:txBody>
+          <a:bodyPr wrap="square">
+            <a:spAutoFit/>
+          </a:bodyPr>
+          <a:lstStyle/>
+          <a:p>
+            <a:pPr algn="l"/>
+            <a:r>
+              <a:rPr sz="1800" b="1" dirty="0" err="1">
+                <a:solidFill>
+                  <a:srgbClr val="2E75B6"/>
+                </a:solidFill>
+                <a:latin typeface="Paperlogy 4 Regular"/>
+              </a:rPr>
+              <a:t>보고용</a:t>
+            </a:r>
+            <a:endParaRPr sz="1800" b="1" dirty="0">
+              <a:solidFill>
+                <a:srgbClr val="2E75B6"/>
+              </a:solidFill>
+              <a:latin typeface="Paperlogy 4 Regular"/>
+            </a:endParaRPr>
+          </a:p>
+        </p:txBody>
+      </p:sp>
+      <p:sp>
+        <p:nvSpPr>
+          <p:cNvPr id="6" name="TextBox 5"/>
+          <p:cNvSpPr txBox="1"/>
+          <p:nvPr/>
+        </p:nvSpPr>
+        <p:spPr>
+          <a:xfrm>
+            <a:off x="457200" y="6250000"/>
+            <a:ext cx="4000000" cy="300000"/>
+          </a:xfrm>
+          <a:prstGeom prst="rect">
+            <a:avLst/>
+          </a:prstGeom>
+          <a:noFill/>
+        </p:spPr>
+        <p:txBody>
+          <a:bodyPr wrap="square">
+            <a:spAutoFit/>
+          </a:bodyPr>
+          <a:lstStyle/>
+          <a:p>
+            <a:pPr algn="l"/>
+            <a:r>
+              <a:rPr sz="1400" b="0">
+                <a:solidFill>
+                  <a:srgbClr val="1F3B57"/>
+                </a:solidFill>
+                <a:latin typeface="Paperlogy 4 Regular"/>
+              </a:rPr>
+              <a:t>2026. 08</a:t>
+            </a:r>
+          </a:p>
+        </p:txBody>
+      </p:sp>
+    </p:spTree>
+  </p:cSld>
+  <p:clrMapOvr>
+    <a:masterClrMapping/>
+  </p:clrMapOvr>
+</p:sld>
+</file>
+
+<file path=ppt/slides/slide2.xml><?xml version="1.0" encoding="utf-8"?>
+<p:sld xmlns:a="http://schemas.openxmlformats.org/drawingml/2006/main" xmlns:r="http://schemas.openxmlformats.org/officeDocument/2006/relationships" xmlns:p="http://schemas.openxmlformats.org/presentationml/2006/main">
+  <p:cSld>
+    <p:spTree>
+      <p:nvGrpSpPr>
+        <p:cNvPr id="1" name=""/>
+        <p:cNvGrpSpPr/>
+        <p:nvPr/>
+      </p:nvGrpSpPr>
+      <p:grpSpPr>
+        <a:xfrm>
+          <a:off x="0" y="0"/>
+          <a:ext cx="0" cy="0"/>
+          <a:chOff x="0" y="0"/>
+          <a:chExt cx="0" cy="0"/>
+        </a:xfrm>
+      </p:grpSpPr>
+      <p:sp>
+        <p:nvSpPr>
+          <p:cNvPr id="2" name="TextBox 1"/>
+          <p:cNvSpPr txBox="1"/>
+          <p:nvPr/>
+        </p:nvSpPr>
+        <p:spPr>
+          <a:xfrm>
             <a:off x="457200" y="137160"/>
             <a:ext cx="11247120" cy="256032"/>
           </a:xfrm>
@@ -5076,7 +5486,7 @@
 </p:sld>
 </file>
 
-<file path=ppt/slides/slide2.xml><?xml version="1.0" encoding="utf-8"?>
+<file path=ppt/slides/slide3.xml><?xml version="1.0" encoding="utf-8"?>
 <p:sld xmlns:a="http://schemas.openxmlformats.org/drawingml/2006/main" xmlns:r="http://schemas.openxmlformats.org/officeDocument/2006/relationships" xmlns:p="http://schemas.openxmlformats.org/presentationml/2006/main">
   <p:cSld>
     <p:spTree>
@@ -6647,7 +7057,7 @@
 </p:sld>
 </file>
 
-<file path=ppt/slides/slide3.xml><?xml version="1.0" encoding="utf-8"?>
+<file path=ppt/slides/slide4.xml><?xml version="1.0" encoding="utf-8"?>
 <p:sld xmlns:a="http://schemas.openxmlformats.org/drawingml/2006/main" xmlns:r="http://schemas.openxmlformats.org/officeDocument/2006/relationships" xmlns:p="http://schemas.openxmlformats.org/presentationml/2006/main">
   <p:cSld>
     <p:spTree>
@@ -8640,7 +9050,7 @@
 </p:sld>
 </file>
 
-<file path=ppt/slides/slide4.xml><?xml version="1.0" encoding="utf-8"?>
+<file path=ppt/slides/slide5.xml><?xml version="1.0" encoding="utf-8"?>
 <p:sld xmlns:a="http://schemas.openxmlformats.org/drawingml/2006/main" xmlns:r="http://schemas.openxmlformats.org/officeDocument/2006/relationships" xmlns:p="http://schemas.openxmlformats.org/presentationml/2006/main">
   <p:cSld>
     <p:spTree>
@@ -9458,7 +9868,7 @@
                     <a:p>
                       <a:pPr algn="ctr"/>
                       <a:r>
-                        <a:rPr sz="1300" b="1" i="0" spc="120" baseline="0">
+                        <a:rPr sz="1300" b="1" i="0" spc="120" baseline="0" dirty="0">
                           <a:solidFill>
                             <a:srgbClr val="1F3B57"/>
                           </a:solidFill>
@@ -10803,7 +11213,7 @@
 </p:sld>
 </file>
 
-<file path=ppt/slides/slide5.xml><?xml version="1.0" encoding="utf-8"?>
+<file path=ppt/slides/slide6.xml><?xml version="1.0" encoding="utf-8"?>
 <p:sld xmlns:a="http://schemas.openxmlformats.org/drawingml/2006/main" xmlns:r="http://schemas.openxmlformats.org/officeDocument/2006/relationships" xmlns:p="http://schemas.openxmlformats.org/presentationml/2006/main">
   <p:cSld>
     <p:spTree>
@@ -12929,7 +13339,7 @@
 </p:sld>
 </file>
 
-<file path=ppt/slides/slide6.xml><?xml version="1.0" encoding="utf-8"?>
+<file path=ppt/slides/slide7.xml><?xml version="1.0" encoding="utf-8"?>
 <p:sld xmlns:a="http://schemas.openxmlformats.org/drawingml/2006/main" xmlns:r="http://schemas.openxmlformats.org/officeDocument/2006/relationships" xmlns:p="http://schemas.openxmlformats.org/presentationml/2006/main">
   <p:cSld>
     <p:spTree>
@@ -13170,7 +13580,7 @@
         </p:nvSpPr>
         <p:spPr>
           <a:xfrm>
-            <a:off x="955853" y="5364780"/>
+            <a:off x="955853" y="5102312"/>
             <a:ext cx="2769327" cy="653690"/>
           </a:xfrm>
           <a:prstGeom prst="roundRect">
@@ -13256,7 +13666,7 @@
         </p:nvSpPr>
         <p:spPr>
           <a:xfrm>
-            <a:off x="4460084" y="5364780"/>
+            <a:off x="4460084" y="5102312"/>
             <a:ext cx="2887599" cy="653690"/>
           </a:xfrm>
           <a:prstGeom prst="roundRect">
@@ -13362,7 +13772,7 @@
         </p:nvSpPr>
         <p:spPr>
           <a:xfrm>
-            <a:off x="8052829" y="5364780"/>
+            <a:off x="8052829" y="5102312"/>
             <a:ext cx="2887599" cy="653690"/>
           </a:xfrm>
           <a:prstGeom prst="roundRect">
@@ -13457,7 +13867,7 @@
         </p:nvCxnSpPr>
         <p:spPr>
           <a:xfrm>
-            <a:off x="3899954" y="5691625"/>
+            <a:off x="3899954" y="5429157"/>
             <a:ext cx="411481" cy="0"/>
           </a:xfrm>
           <a:prstGeom prst="line">
@@ -13496,7 +13906,7 @@
         </p:nvCxnSpPr>
         <p:spPr>
           <a:xfrm>
-            <a:off x="7494516" y="5691625"/>
+            <a:off x="7494516" y="5429157"/>
             <a:ext cx="411480" cy="0"/>
           </a:xfrm>
           <a:prstGeom prst="line">
@@ -15141,6 +15551,1349 @@
         </a:graphic>
       </p:graphicFrame>
     </p:spTree>
+  </p:cSld>
+  <p:clrMapOvr>
+    <a:masterClrMapping/>
+  </p:clrMapOvr>
+</p:sld>
+</file>
+
+<file path=ppt/slides/slide8.xml><?xml version="1.0" encoding="utf-8"?>
+<p:sld xmlns:a="http://schemas.openxmlformats.org/drawingml/2006/main" xmlns:r="http://schemas.openxmlformats.org/officeDocument/2006/relationships" xmlns:p="http://schemas.openxmlformats.org/presentationml/2006/main">
+  <p:cSld>
+    <p:spTree>
+      <p:nvGrpSpPr>
+        <p:cNvPr id="1" name="">
+          <a:extLst>
+            <a:ext uri="{FF2B5EF4-FFF2-40B4-BE49-F238E27FC236}">
+              <a16:creationId xmlns:a16="http://schemas.microsoft.com/office/drawing/2014/main" id="{F2068857-FD33-EB00-F317-E4493F400DD8}"/>
+            </a:ext>
+          </a:extLst>
+        </p:cNvPr>
+        <p:cNvGrpSpPr/>
+        <p:nvPr/>
+      </p:nvGrpSpPr>
+      <p:grpSpPr>
+        <a:xfrm>
+          <a:off x="0" y="0"/>
+          <a:ext cx="0" cy="0"/>
+          <a:chOff x="0" y="0"/>
+          <a:chExt cx="0" cy="0"/>
+        </a:xfrm>
+      </p:grpSpPr>
+      <p:pic>
+        <p:nvPicPr>
+          <p:cNvPr id="21" name="그림 20">
+            <a:extLst>
+              <a:ext uri="{FF2B5EF4-FFF2-40B4-BE49-F238E27FC236}">
+                <a16:creationId xmlns:a16="http://schemas.microsoft.com/office/drawing/2014/main" id="{726BF560-316D-C749-AF43-42508E1ABC60}"/>
+              </a:ext>
+            </a:extLst>
+          </p:cNvPr>
+          <p:cNvPicPr>
+            <a:picLocks noChangeAspect="1"/>
+          </p:cNvPicPr>
+          <p:nvPr/>
+        </p:nvPicPr>
+        <p:blipFill>
+          <a:blip r:embed="rId3"/>
+          <a:srcRect t="6004" r="2124" b="12452"/>
+          <a:stretch>
+            <a:fillRect/>
+          </a:stretch>
+        </p:blipFill>
+        <p:spPr>
+          <a:xfrm>
+            <a:off x="6762310" y="1107156"/>
+            <a:ext cx="4936741" cy="4319911"/>
+          </a:xfrm>
+          <a:prstGeom prst="rect">
+            <a:avLst/>
+          </a:prstGeom>
+          <a:ln w="19050">
+            <a:solidFill>
+              <a:schemeClr val="tx1"/>
+            </a:solidFill>
+          </a:ln>
+        </p:spPr>
+      </p:pic>
+      <p:sp>
+        <p:nvSpPr>
+          <p:cNvPr id="2" name="TextBox 1">
+            <a:extLst>
+              <a:ext uri="{FF2B5EF4-FFF2-40B4-BE49-F238E27FC236}">
+                <a16:creationId xmlns:a16="http://schemas.microsoft.com/office/drawing/2014/main" id="{348E063B-D599-238A-9D17-F91DC3756ABB}"/>
+              </a:ext>
+            </a:extLst>
+          </p:cNvPr>
+          <p:cNvSpPr txBox="1"/>
+          <p:nvPr/>
+        </p:nvSpPr>
+        <p:spPr>
+          <a:xfrm>
+            <a:off x="457200" y="137160"/>
+            <a:ext cx="11247120" cy="256032"/>
+          </a:xfrm>
+          <a:prstGeom prst="rect">
+            <a:avLst/>
+          </a:prstGeom>
+          <a:noFill/>
+        </p:spPr>
+        <p:txBody>
+          <a:bodyPr wrap="square">
+            <a:spAutoFit/>
+          </a:bodyPr>
+          <a:lstStyle/>
+          <a:p>
+            <a:r>
+              <a:rPr lang="en-US" altLang="ko-KR" sz="1050" b="1" spc="120" dirty="0">
+                <a:solidFill>
+                  <a:srgbClr val="2E75B6"/>
+                </a:solidFill>
+                <a:latin typeface="Paperlogy 4 Regular" pitchFamily="2" charset="-127"/>
+                <a:ea typeface="Paperlogy 4 Regular" pitchFamily="2" charset="-127"/>
+              </a:rPr>
+              <a:t>7</a:t>
+            </a:r>
+            <a:r>
+              <a:rPr sz="1050" b="1" i="0" spc="120" dirty="0">
+                <a:solidFill>
+                  <a:srgbClr val="2E75B6"/>
+                </a:solidFill>
+                <a:latin typeface="Paperlogy 4 Regular" pitchFamily="2" charset="-127"/>
+                <a:ea typeface="Paperlogy 4 Regular" pitchFamily="2" charset="-127"/>
+              </a:rPr>
+              <a:t>. </a:t>
+            </a:r>
+            <a:r>
+              <a:rPr lang="ko-KR" altLang="en-US" sz="1050" b="1" i="0" spc="120" dirty="0">
+                <a:solidFill>
+                  <a:srgbClr val="2E75B6"/>
+                </a:solidFill>
+                <a:latin typeface="Paperlogy 4 Regular" pitchFamily="2" charset="-127"/>
+                <a:ea typeface="Paperlogy 4 Regular" pitchFamily="2" charset="-127"/>
+              </a:rPr>
+              <a:t>현황</a:t>
+            </a:r>
+            <a:endParaRPr sz="1050" b="1" i="0" spc="120" dirty="0">
+              <a:solidFill>
+                <a:srgbClr val="2E75B6"/>
+              </a:solidFill>
+              <a:latin typeface="Paperlogy 4 Regular" pitchFamily="2" charset="-127"/>
+              <a:ea typeface="Paperlogy 4 Regular" pitchFamily="2" charset="-127"/>
+            </a:endParaRPr>
+          </a:p>
+        </p:txBody>
+      </p:sp>
+      <p:sp>
+        <p:nvSpPr>
+          <p:cNvPr id="3" name="TextBox 2">
+            <a:extLst>
+              <a:ext uri="{FF2B5EF4-FFF2-40B4-BE49-F238E27FC236}">
+                <a16:creationId xmlns:a16="http://schemas.microsoft.com/office/drawing/2014/main" id="{B9023887-C0E4-5BB9-151C-A8102A65A3E8}"/>
+              </a:ext>
+            </a:extLst>
+          </p:cNvPr>
+          <p:cNvSpPr txBox="1"/>
+          <p:nvPr/>
+        </p:nvSpPr>
+        <p:spPr>
+          <a:xfrm>
+            <a:off x="457200" y="365760"/>
+            <a:ext cx="11247120" cy="430887"/>
+          </a:xfrm>
+          <a:prstGeom prst="rect">
+            <a:avLst/>
+          </a:prstGeom>
+          <a:noFill/>
+        </p:spPr>
+        <p:txBody>
+          <a:bodyPr wrap="square">
+            <a:spAutoFit/>
+          </a:bodyPr>
+          <a:lstStyle/>
+          <a:p>
+            <a:r>
+              <a:rPr lang="ko-KR" altLang="en-US" sz="2200" b="1" i="0" spc="120" dirty="0">
+                <a:solidFill>
+                  <a:srgbClr val="1F3B57"/>
+                </a:solidFill>
+                <a:latin typeface="Paperlogy 4 Regular" pitchFamily="2" charset="-127"/>
+                <a:ea typeface="Paperlogy 4 Regular" pitchFamily="2" charset="-127"/>
+              </a:rPr>
+              <a:t>어떻게 진행해왔나</a:t>
+            </a:r>
+            <a:endParaRPr sz="2200" b="1" i="0" spc="120" dirty="0">
+              <a:solidFill>
+                <a:srgbClr val="1F3B57"/>
+              </a:solidFill>
+              <a:latin typeface="Paperlogy 4 Regular" pitchFamily="2" charset="-127"/>
+              <a:ea typeface="Paperlogy 4 Regular" pitchFamily="2" charset="-127"/>
+            </a:endParaRPr>
+          </a:p>
+        </p:txBody>
+      </p:sp>
+      <p:sp>
+        <p:nvSpPr>
+          <p:cNvPr id="4" name="Rectangle 3">
+            <a:extLst>
+              <a:ext uri="{FF2B5EF4-FFF2-40B4-BE49-F238E27FC236}">
+                <a16:creationId xmlns:a16="http://schemas.microsoft.com/office/drawing/2014/main" id="{C9AFFD7A-4640-2C2F-3E28-7EE0CB355AFD}"/>
+              </a:ext>
+            </a:extLst>
+          </p:cNvPr>
+          <p:cNvSpPr/>
+          <p:nvPr/>
+        </p:nvSpPr>
+        <p:spPr>
+          <a:xfrm>
+            <a:off x="457200" y="914400"/>
+            <a:ext cx="11274552" cy="27432"/>
+          </a:xfrm>
+          <a:prstGeom prst="rect">
+            <a:avLst/>
+          </a:prstGeom>
+          <a:solidFill>
+            <a:srgbClr val="2E75B6"/>
+          </a:solidFill>
+          <a:ln>
+            <a:noFill/>
+          </a:ln>
+          <a:effectLst/>
+        </p:spPr>
+        <p:style>
+          <a:lnRef idx="1">
+            <a:schemeClr val="accent1"/>
+          </a:lnRef>
+          <a:fillRef idx="3">
+            <a:schemeClr val="accent1"/>
+          </a:fillRef>
+          <a:effectRef idx="2">
+            <a:schemeClr val="accent1"/>
+          </a:effectRef>
+          <a:fontRef idx="minor">
+            <a:schemeClr val="lt1"/>
+          </a:fontRef>
+        </p:style>
+        <p:txBody>
+          <a:bodyPr rtlCol="0" anchor="ctr"/>
+          <a:lstStyle/>
+          <a:p>
+            <a:pPr algn="ctr"/>
+            <a:endParaRPr spc="120">
+              <a:latin typeface="Paperlogy 4 Regular" pitchFamily="2" charset="-127"/>
+              <a:ea typeface="Paperlogy 4 Regular" pitchFamily="2" charset="-127"/>
+            </a:endParaRPr>
+          </a:p>
+        </p:txBody>
+      </p:sp>
+      <p:sp>
+        <p:nvSpPr>
+          <p:cNvPr id="11" name="TextBox 10">
+            <a:extLst>
+              <a:ext uri="{FF2B5EF4-FFF2-40B4-BE49-F238E27FC236}">
+                <a16:creationId xmlns:a16="http://schemas.microsoft.com/office/drawing/2014/main" id="{5012E914-54F5-5364-D2D0-F5902C5AE2CD}"/>
+              </a:ext>
+            </a:extLst>
+          </p:cNvPr>
+          <p:cNvSpPr txBox="1"/>
+          <p:nvPr/>
+        </p:nvSpPr>
+        <p:spPr>
+          <a:xfrm>
+            <a:off x="556187" y="1054915"/>
+            <a:ext cx="5606022" cy="4893647"/>
+          </a:xfrm>
+          <a:prstGeom prst="rect">
+            <a:avLst/>
+          </a:prstGeom>
+          <a:noFill/>
+        </p:spPr>
+        <p:txBody>
+          <a:bodyPr wrap="square" rtlCol="0">
+            <a:spAutoFit/>
+          </a:bodyPr>
+          <a:lstStyle/>
+          <a:p>
+            <a:r>
+              <a:rPr lang="ko-KR" altLang="ko-KR" sz="1300" dirty="0"/>
+              <a:t>■ </a:t>
+            </a:r>
+            <a:r>
+              <a:rPr lang="ko-KR" altLang="ko-KR" sz="1300" dirty="0" err="1"/>
+              <a:t>AI활용</a:t>
+            </a:r>
+            <a:r>
+              <a:rPr lang="ko-KR" altLang="ko-KR" sz="1300" dirty="0"/>
+              <a:t> 방법론 기반 자산화 진행현황</a:t>
+            </a:r>
+          </a:p>
+          <a:p>
+            <a:endParaRPr lang="ko-KR" altLang="ko-KR" sz="1300" dirty="0"/>
+          </a:p>
+          <a:p>
+            <a:r>
+              <a:rPr lang="ko-KR" altLang="ko-KR" sz="1300" dirty="0"/>
+              <a:t>1. 방법론 수립 (7/6</a:t>
+            </a:r>
+            <a:r>
+              <a:rPr lang="ko-KR" altLang="en-US" sz="1300" dirty="0"/>
+              <a:t> </a:t>
+            </a:r>
+            <a:r>
+              <a:rPr lang="ko-KR" altLang="ko-KR" sz="1300" dirty="0"/>
+              <a:t>~</a:t>
+            </a:r>
+            <a:r>
+              <a:rPr lang="ko-KR" altLang="en-US" sz="1300" dirty="0"/>
+              <a:t> </a:t>
+            </a:r>
+            <a:r>
+              <a:rPr lang="ko-KR" altLang="ko-KR" sz="1300" dirty="0"/>
+              <a:t>24)</a:t>
+            </a:r>
+          </a:p>
+          <a:p>
+            <a:r>
+              <a:rPr lang="ko-KR" altLang="ko-KR" sz="1300" dirty="0"/>
+              <a:t>   - </a:t>
+            </a:r>
+            <a:r>
+              <a:rPr lang="ko-KR" altLang="ko-KR" sz="1300" dirty="0" err="1"/>
+              <a:t>AI를</a:t>
+            </a:r>
+            <a:r>
+              <a:rPr lang="ko-KR" altLang="ko-KR" sz="1300" dirty="0"/>
+              <a:t> 활용한 산출물 자산화를 위해 체계적 방법론 필요성 확인</a:t>
+            </a:r>
+          </a:p>
+          <a:p>
+            <a:r>
+              <a:rPr lang="ko-KR" altLang="ko-KR" sz="1300" dirty="0"/>
+              <a:t>   - </a:t>
+            </a:r>
+            <a:r>
+              <a:rPr lang="ko-KR" altLang="ko-KR" sz="1300" dirty="0" err="1"/>
+              <a:t>AI활용</a:t>
+            </a:r>
+            <a:r>
+              <a:rPr lang="ko-KR" altLang="ko-KR" sz="1300" dirty="0"/>
+              <a:t> 개발공정 지침서 v2.0 초안 수립</a:t>
+            </a:r>
+          </a:p>
+          <a:p>
+            <a:endParaRPr lang="ko-KR" altLang="ko-KR" sz="1300" dirty="0"/>
+          </a:p>
+          <a:p>
+            <a:r>
+              <a:rPr lang="ko-KR" altLang="ko-KR" sz="1300" dirty="0"/>
+              <a:t>2. 유형별 방법론 적용 및 개선점 도출 (7/24</a:t>
+            </a:r>
+            <a:r>
+              <a:rPr lang="ko-KR" altLang="en-US" sz="1300" dirty="0"/>
+              <a:t> </a:t>
+            </a:r>
+            <a:r>
+              <a:rPr lang="ko-KR" altLang="ko-KR" sz="1300" dirty="0"/>
+              <a:t>~</a:t>
+            </a:r>
+            <a:r>
+              <a:rPr lang="ko-KR" altLang="en-US" sz="1300" dirty="0"/>
+              <a:t> </a:t>
+            </a:r>
+            <a:r>
+              <a:rPr lang="ko-KR" altLang="ko-KR" sz="1300" dirty="0"/>
+              <a:t>31)</a:t>
+            </a:r>
+          </a:p>
+          <a:p>
+            <a:r>
+              <a:rPr lang="ko-KR" altLang="ko-KR" sz="1300" dirty="0"/>
+              <a:t>   - 산출물을 유형(</a:t>
+            </a:r>
+            <a:r>
+              <a:rPr lang="ko-KR" altLang="ko-KR" sz="1300" dirty="0" err="1"/>
+              <a:t>Proposal</a:t>
+            </a:r>
+            <a:r>
+              <a:rPr lang="ko-KR" altLang="ko-KR" sz="1300" dirty="0"/>
+              <a:t>/</a:t>
+            </a:r>
+            <a:r>
+              <a:rPr lang="ko-KR" altLang="ko-KR" sz="1300" dirty="0" err="1"/>
+              <a:t>Spec</a:t>
+            </a:r>
+            <a:r>
+              <a:rPr lang="ko-KR" altLang="ko-KR" sz="1300" dirty="0"/>
+              <a:t>/</a:t>
+            </a:r>
+            <a:r>
+              <a:rPr lang="ko-KR" altLang="ko-KR" sz="1300" dirty="0" err="1"/>
+              <a:t>Design</a:t>
+            </a:r>
+            <a:r>
+              <a:rPr lang="ko-KR" altLang="ko-KR" sz="1300" dirty="0"/>
+              <a:t>/</a:t>
+            </a:r>
+            <a:r>
+              <a:rPr lang="ko-KR" altLang="ko-KR" sz="1300" dirty="0" err="1"/>
+              <a:t>Task</a:t>
+            </a:r>
+            <a:r>
+              <a:rPr lang="ko-KR" altLang="ko-KR" sz="1300" dirty="0"/>
+              <a:t>)별로 작성 시도</a:t>
+            </a:r>
+          </a:p>
+          <a:p>
+            <a:r>
+              <a:rPr lang="ko-KR" altLang="ko-KR" sz="1300" dirty="0"/>
+              <a:t>   - 개선점: 산출물 간 </a:t>
+            </a:r>
+            <a:r>
+              <a:rPr lang="ko-KR" altLang="ko-KR" sz="1300" dirty="0" err="1"/>
+              <a:t>선후행</a:t>
+            </a:r>
+            <a:r>
+              <a:rPr lang="ko-KR" altLang="ko-KR" sz="1300" dirty="0"/>
+              <a:t> 의존관계를 고려한 작성순서 체계 필요</a:t>
+            </a:r>
+          </a:p>
+          <a:p>
+            <a:r>
+              <a:rPr lang="ko-KR" altLang="ko-KR" sz="1300" dirty="0"/>
+              <a:t>   </a:t>
+            </a:r>
+            <a:r>
+              <a:rPr lang="en-US" altLang="ko-KR" sz="1300" dirty="0"/>
+              <a:t>(</a:t>
+            </a:r>
+            <a:r>
+              <a:rPr lang="ko-KR" altLang="en-US" sz="1300" dirty="0"/>
+              <a:t>일부 </a:t>
+            </a:r>
+            <a:r>
+              <a:rPr lang="en-US" altLang="ko-KR" sz="1300" dirty="0"/>
+              <a:t>Spec </a:t>
+            </a:r>
+            <a:r>
+              <a:rPr lang="ko-KR" altLang="en-US" sz="1300" dirty="0"/>
+              <a:t>산출물이 아직 미확정인 </a:t>
+            </a:r>
+            <a:r>
+              <a:rPr lang="en-US" altLang="ko-KR" sz="1300" dirty="0"/>
+              <a:t>Design</a:t>
+            </a:r>
+            <a:r>
+              <a:rPr lang="ko-KR" altLang="en-US" sz="1300" dirty="0" err="1"/>
+              <a:t>를</a:t>
+            </a:r>
+            <a:r>
+              <a:rPr lang="ko-KR" altLang="en-US" sz="1300" dirty="0"/>
+              <a:t> 참조해야 하는 순환</a:t>
+            </a:r>
+            <a:r>
+              <a:rPr lang="en-US" altLang="ko-KR" sz="1300" dirty="0"/>
+              <a:t>)</a:t>
+            </a:r>
+          </a:p>
+          <a:p>
+            <a:endParaRPr lang="ko-KR" altLang="ko-KR" sz="1300" dirty="0"/>
+          </a:p>
+          <a:p>
+            <a:r>
+              <a:rPr lang="ko-KR" altLang="ko-KR" sz="1300" dirty="0"/>
+              <a:t>3. 단계별(작성순서) 방법론으로 전환 (8/3~현재)</a:t>
+            </a:r>
+          </a:p>
+          <a:p>
+            <a:r>
+              <a:rPr lang="ko-KR" altLang="ko-KR" sz="1300" dirty="0"/>
+              <a:t>   - 의존관계 기반으로 재구성</a:t>
+            </a:r>
+          </a:p>
+          <a:p>
+            <a:r>
+              <a:rPr lang="ko-KR" altLang="ko-KR" sz="1300" dirty="0"/>
+              <a:t>     (</a:t>
+            </a:r>
+            <a:r>
+              <a:rPr lang="ko-KR" altLang="ko-KR" sz="1300" dirty="0" err="1"/>
+              <a:t>착수→범위정의→구조설계→상세설계→구현→테스트→안정화</a:t>
+            </a:r>
+            <a:r>
+              <a:rPr lang="ko-KR" altLang="ko-KR" sz="1300" dirty="0"/>
+              <a:t>)</a:t>
+            </a:r>
+          </a:p>
+          <a:p>
+            <a:r>
+              <a:rPr lang="ko-KR" altLang="ko-KR" sz="1300" dirty="0"/>
+              <a:t>   - 선행 산출물 확정 후 다음 산출물 작성 → 순환 참조 해소</a:t>
+            </a:r>
+          </a:p>
+          <a:p>
+            <a:r>
+              <a:rPr lang="ko-KR" altLang="ko-KR" sz="1300" dirty="0"/>
+              <a:t>   - 지침서 v2.3 적용 중</a:t>
+            </a:r>
+            <a:br>
+              <a:rPr lang="ko-KR" altLang="ko-KR" sz="1300" dirty="0"/>
+            </a:br>
+            <a:endParaRPr lang="ko-KR" altLang="ko-KR" sz="1300" dirty="0"/>
+          </a:p>
+          <a:p>
+            <a:r>
+              <a:rPr lang="ko-KR" altLang="ko-KR" sz="1300" dirty="0"/>
+              <a:t>4. 현재 진행 상태</a:t>
+            </a:r>
+          </a:p>
+          <a:p>
+            <a:r>
+              <a:rPr lang="ko-KR" altLang="ko-KR" sz="1300" dirty="0"/>
+              <a:t>   - S0(착수) ~ S2(구조설계): 완료 — 산출물 23개 확정</a:t>
+            </a:r>
+          </a:p>
+          <a:p>
+            <a:r>
+              <a:rPr lang="ko-KR" altLang="ko-KR" sz="1300" dirty="0"/>
+              <a:t>   - S3(상세설계): 1차 파트(</a:t>
+            </a:r>
+            <a:r>
+              <a:rPr lang="ko-KR" altLang="ko-KR" sz="1300" dirty="0" err="1"/>
+              <a:t>Order+Payment</a:t>
+            </a:r>
+            <a:r>
+              <a:rPr lang="ko-KR" altLang="ko-KR" sz="1300" dirty="0"/>
+              <a:t>) 대상 진입 준비 중</a:t>
+            </a:r>
+          </a:p>
+          <a:p>
+            <a:endParaRPr lang="ko-KR" altLang="ko-KR" sz="1300" dirty="0"/>
+          </a:p>
+          <a:p>
+            <a:r>
+              <a:rPr lang="ko-KR" altLang="ko-KR" sz="1300" dirty="0"/>
+              <a:t>5. 향후 계획</a:t>
+            </a:r>
+          </a:p>
+          <a:p>
+            <a:r>
+              <a:rPr lang="ko-KR" altLang="ko-KR" sz="1300" dirty="0"/>
+              <a:t>   - 8~9월: S3 완료 → 구현 착수</a:t>
+            </a:r>
+          </a:p>
+          <a:p>
+            <a:r>
+              <a:rPr lang="ko-KR" altLang="ko-KR" sz="1300" dirty="0"/>
+              <a:t>   - 10월: 2차 파트 확장 + 신규 인력 합류 시 방법론 </a:t>
+            </a:r>
+            <a:r>
+              <a:rPr lang="ko-KR" altLang="ko-KR" sz="1300" dirty="0" err="1"/>
+              <a:t>온보딩</a:t>
+            </a:r>
+            <a:r>
+              <a:rPr lang="ko-KR" altLang="ko-KR" sz="1300" dirty="0"/>
+              <a:t> 검증</a:t>
+            </a:r>
+          </a:p>
+        </p:txBody>
+      </p:sp>
+      <p:sp>
+        <p:nvSpPr>
+          <p:cNvPr id="17" name="직사각형 16">
+            <a:extLst>
+              <a:ext uri="{FF2B5EF4-FFF2-40B4-BE49-F238E27FC236}">
+                <a16:creationId xmlns:a16="http://schemas.microsoft.com/office/drawing/2014/main" id="{A09314A4-15E9-A399-1CEC-F38115E391C5}"/>
+              </a:ext>
+            </a:extLst>
+          </p:cNvPr>
+          <p:cNvSpPr/>
+          <p:nvPr/>
+        </p:nvSpPr>
+        <p:spPr>
+          <a:xfrm>
+            <a:off x="6613450" y="1733482"/>
+            <a:ext cx="1307809" cy="450655"/>
+          </a:xfrm>
+          <a:prstGeom prst="rect">
+            <a:avLst/>
+          </a:prstGeom>
+          <a:noFill/>
+          <a:ln w="19050">
+            <a:solidFill>
+              <a:schemeClr val="accent1"/>
+            </a:solidFill>
+          </a:ln>
+        </p:spPr>
+        <p:style>
+          <a:lnRef idx="1">
+            <a:schemeClr val="accent1"/>
+          </a:lnRef>
+          <a:fillRef idx="3">
+            <a:schemeClr val="accent1"/>
+          </a:fillRef>
+          <a:effectRef idx="2">
+            <a:schemeClr val="accent1"/>
+          </a:effectRef>
+          <a:fontRef idx="minor">
+            <a:schemeClr val="lt1"/>
+          </a:fontRef>
+        </p:style>
+        <p:txBody>
+          <a:bodyPr rtlCol="0" anchor="ctr"/>
+          <a:lstStyle/>
+          <a:p>
+            <a:pPr algn="ctr"/>
+            <a:endParaRPr kumimoji="1" lang="ko-KR" altLang="en-US"/>
+          </a:p>
+        </p:txBody>
+      </p:sp>
+      <p:sp>
+        <p:nvSpPr>
+          <p:cNvPr id="18" name="직사각형 17">
+            <a:extLst>
+              <a:ext uri="{FF2B5EF4-FFF2-40B4-BE49-F238E27FC236}">
+                <a16:creationId xmlns:a16="http://schemas.microsoft.com/office/drawing/2014/main" id="{A329ECD9-23C5-5990-4780-47F5C77A80B4}"/>
+              </a:ext>
+            </a:extLst>
+          </p:cNvPr>
+          <p:cNvSpPr/>
+          <p:nvPr/>
+        </p:nvSpPr>
+        <p:spPr>
+          <a:xfrm>
+            <a:off x="6613450" y="2258114"/>
+            <a:ext cx="1307809" cy="782795"/>
+          </a:xfrm>
+          <a:prstGeom prst="rect">
+            <a:avLst/>
+          </a:prstGeom>
+          <a:noFill/>
+          <a:ln w="19050">
+            <a:solidFill>
+              <a:schemeClr val="accent1"/>
+            </a:solidFill>
+          </a:ln>
+        </p:spPr>
+        <p:style>
+          <a:lnRef idx="1">
+            <a:schemeClr val="accent1"/>
+          </a:lnRef>
+          <a:fillRef idx="3">
+            <a:schemeClr val="accent1"/>
+          </a:fillRef>
+          <a:effectRef idx="2">
+            <a:schemeClr val="accent1"/>
+          </a:effectRef>
+          <a:fontRef idx="minor">
+            <a:schemeClr val="lt1"/>
+          </a:fontRef>
+        </p:style>
+        <p:txBody>
+          <a:bodyPr rtlCol="0" anchor="ctr"/>
+          <a:lstStyle/>
+          <a:p>
+            <a:pPr algn="ctr"/>
+            <a:endParaRPr kumimoji="1" lang="ko-KR" altLang="en-US"/>
+          </a:p>
+        </p:txBody>
+      </p:sp>
+      <p:sp>
+        <p:nvSpPr>
+          <p:cNvPr id="19" name="직사각형 18">
+            <a:extLst>
+              <a:ext uri="{FF2B5EF4-FFF2-40B4-BE49-F238E27FC236}">
+                <a16:creationId xmlns:a16="http://schemas.microsoft.com/office/drawing/2014/main" id="{FA8F1B41-2B7E-378D-5244-9A344F674888}"/>
+              </a:ext>
+            </a:extLst>
+          </p:cNvPr>
+          <p:cNvSpPr/>
+          <p:nvPr/>
+        </p:nvSpPr>
+        <p:spPr>
+          <a:xfrm>
+            <a:off x="6615329" y="3148676"/>
+            <a:ext cx="1320108" cy="1178772"/>
+          </a:xfrm>
+          <a:prstGeom prst="rect">
+            <a:avLst/>
+          </a:prstGeom>
+          <a:noFill/>
+          <a:ln w="19050">
+            <a:solidFill>
+              <a:schemeClr val="accent1"/>
+            </a:solidFill>
+          </a:ln>
+        </p:spPr>
+        <p:style>
+          <a:lnRef idx="1">
+            <a:schemeClr val="accent1"/>
+          </a:lnRef>
+          <a:fillRef idx="3">
+            <a:schemeClr val="accent1"/>
+          </a:fillRef>
+          <a:effectRef idx="2">
+            <a:schemeClr val="accent1"/>
+          </a:effectRef>
+          <a:fontRef idx="minor">
+            <a:schemeClr val="lt1"/>
+          </a:fontRef>
+        </p:style>
+        <p:txBody>
+          <a:bodyPr rtlCol="0" anchor="ctr"/>
+          <a:lstStyle/>
+          <a:p>
+            <a:pPr algn="ctr"/>
+            <a:endParaRPr kumimoji="1" lang="ko-KR" altLang="en-US"/>
+          </a:p>
+        </p:txBody>
+      </p:sp>
+      <p:sp>
+        <p:nvSpPr>
+          <p:cNvPr id="20" name="직사각형 19">
+            <a:extLst>
+              <a:ext uri="{FF2B5EF4-FFF2-40B4-BE49-F238E27FC236}">
+                <a16:creationId xmlns:a16="http://schemas.microsoft.com/office/drawing/2014/main" id="{383825A7-D41F-C988-1486-9D6B49EEE979}"/>
+              </a:ext>
+            </a:extLst>
+          </p:cNvPr>
+          <p:cNvSpPr/>
+          <p:nvPr/>
+        </p:nvSpPr>
+        <p:spPr>
+          <a:xfrm>
+            <a:off x="6613449" y="4710220"/>
+            <a:ext cx="1307809" cy="716847"/>
+          </a:xfrm>
+          <a:prstGeom prst="rect">
+            <a:avLst/>
+          </a:prstGeom>
+          <a:noFill/>
+          <a:ln w="19050">
+            <a:solidFill>
+              <a:schemeClr val="accent1"/>
+            </a:solidFill>
+          </a:ln>
+        </p:spPr>
+        <p:style>
+          <a:lnRef idx="1">
+            <a:schemeClr val="accent1"/>
+          </a:lnRef>
+          <a:fillRef idx="3">
+            <a:schemeClr val="accent1"/>
+          </a:fillRef>
+          <a:effectRef idx="2">
+            <a:schemeClr val="accent1"/>
+          </a:effectRef>
+          <a:fontRef idx="minor">
+            <a:schemeClr val="lt1"/>
+          </a:fontRef>
+        </p:style>
+        <p:txBody>
+          <a:bodyPr rtlCol="0" anchor="ctr"/>
+          <a:lstStyle/>
+          <a:p>
+            <a:pPr algn="ctr"/>
+            <a:endParaRPr kumimoji="1" lang="ko-KR" altLang="en-US"/>
+          </a:p>
+        </p:txBody>
+      </p:sp>
+      <p:sp>
+        <p:nvSpPr>
+          <p:cNvPr id="22" name="TextBox 21">
+            <a:extLst>
+              <a:ext uri="{FF2B5EF4-FFF2-40B4-BE49-F238E27FC236}">
+                <a16:creationId xmlns:a16="http://schemas.microsoft.com/office/drawing/2014/main" id="{6C80E823-7371-809B-218E-DE7D28C4516F}"/>
+              </a:ext>
+            </a:extLst>
+          </p:cNvPr>
+          <p:cNvSpPr txBox="1"/>
+          <p:nvPr/>
+        </p:nvSpPr>
+        <p:spPr>
+          <a:xfrm>
+            <a:off x="5847908" y="4667690"/>
+            <a:ext cx="736066" cy="784830"/>
+          </a:xfrm>
+          <a:prstGeom prst="rect">
+            <a:avLst/>
+          </a:prstGeom>
+          <a:noFill/>
+        </p:spPr>
+        <p:txBody>
+          <a:bodyPr wrap="square" rtlCol="0">
+            <a:spAutoFit/>
+          </a:bodyPr>
+          <a:lstStyle/>
+          <a:p>
+            <a:pPr algn="ctr"/>
+            <a:r>
+              <a:rPr kumimoji="1" lang="ko-KR" altLang="en-US" sz="1200" b="1" dirty="0">
+                <a:solidFill>
+                  <a:srgbClr val="00B050"/>
+                </a:solidFill>
+                <a:latin typeface="Paperlogy 4 Regular" pitchFamily="2" charset="-127"/>
+                <a:ea typeface="Paperlogy 4 Regular" pitchFamily="2" charset="-127"/>
+              </a:rPr>
+              <a:t>자료</a:t>
+            </a:r>
+            <a:br>
+              <a:rPr kumimoji="1" lang="en-US" altLang="ko-KR" sz="1200" dirty="0">
+                <a:solidFill>
+                  <a:srgbClr val="00B050"/>
+                </a:solidFill>
+                <a:latin typeface="Paperlogy 4 Regular" pitchFamily="2" charset="-127"/>
+                <a:ea typeface="Paperlogy 4 Regular" pitchFamily="2" charset="-127"/>
+              </a:rPr>
+            </a:br>
+            <a:r>
+              <a:rPr kumimoji="1" lang="ko-KR" altLang="en-US" sz="1100" dirty="0">
+                <a:solidFill>
+                  <a:schemeClr val="tx1">
+                    <a:lumMod val="65000"/>
+                    <a:lumOff val="35000"/>
+                  </a:schemeClr>
+                </a:solidFill>
+                <a:latin typeface="Paperlogy 4 Regular" pitchFamily="2" charset="-127"/>
+                <a:ea typeface="Paperlogy 4 Regular" pitchFamily="2" charset="-127"/>
+              </a:rPr>
+              <a:t>  </a:t>
+            </a:r>
+            <a:r>
+              <a:rPr kumimoji="1" lang="en-US" altLang="ko-KR" sz="1100" dirty="0">
+                <a:solidFill>
+                  <a:schemeClr val="tx1">
+                    <a:lumMod val="65000"/>
+                    <a:lumOff val="35000"/>
+                  </a:schemeClr>
+                </a:solidFill>
+                <a:latin typeface="Paperlogy 4 Regular" pitchFamily="2" charset="-127"/>
+                <a:ea typeface="Paperlogy 4 Regular" pitchFamily="2" charset="-127"/>
+              </a:rPr>
+              <a:t>RFP</a:t>
+            </a:r>
+          </a:p>
+          <a:p>
+            <a:pPr algn="ctr"/>
+            <a:r>
+              <a:rPr kumimoji="1" lang="ko-KR" altLang="en-US" sz="1100" dirty="0">
+                <a:solidFill>
+                  <a:schemeClr val="tx1">
+                    <a:lumMod val="65000"/>
+                    <a:lumOff val="35000"/>
+                  </a:schemeClr>
+                </a:solidFill>
+                <a:latin typeface="Paperlogy 4 Regular" pitchFamily="2" charset="-127"/>
+                <a:ea typeface="Paperlogy 4 Regular" pitchFamily="2" charset="-127"/>
+              </a:rPr>
+              <a:t> 정책서</a:t>
+            </a:r>
+            <a:endParaRPr kumimoji="1" lang="en-US" altLang="ko-KR" sz="1100" dirty="0">
+              <a:solidFill>
+                <a:schemeClr val="tx1">
+                  <a:lumMod val="65000"/>
+                  <a:lumOff val="35000"/>
+                </a:schemeClr>
+              </a:solidFill>
+              <a:latin typeface="Paperlogy 4 Regular" pitchFamily="2" charset="-127"/>
+              <a:ea typeface="Paperlogy 4 Regular" pitchFamily="2" charset="-127"/>
+            </a:endParaRPr>
+          </a:p>
+          <a:p>
+            <a:pPr algn="ctr"/>
+            <a:r>
+              <a:rPr kumimoji="1" lang="ko-KR" altLang="en-US" sz="1100" dirty="0">
+                <a:solidFill>
+                  <a:schemeClr val="tx1">
+                    <a:lumMod val="65000"/>
+                    <a:lumOff val="35000"/>
+                  </a:schemeClr>
+                </a:solidFill>
+                <a:latin typeface="Paperlogy 4 Regular" pitchFamily="2" charset="-127"/>
+                <a:ea typeface="Paperlogy 4 Regular" pitchFamily="2" charset="-127"/>
+              </a:rPr>
+              <a:t>  자산</a:t>
+            </a:r>
+          </a:p>
+        </p:txBody>
+      </p:sp>
+      <p:sp>
+        <p:nvSpPr>
+          <p:cNvPr id="24" name="TextBox 23">
+            <a:extLst>
+              <a:ext uri="{FF2B5EF4-FFF2-40B4-BE49-F238E27FC236}">
+                <a16:creationId xmlns:a16="http://schemas.microsoft.com/office/drawing/2014/main" id="{56AF9CAA-63A4-944C-BD91-3B35C1753845}"/>
+              </a:ext>
+            </a:extLst>
+          </p:cNvPr>
+          <p:cNvSpPr txBox="1"/>
+          <p:nvPr/>
+        </p:nvSpPr>
+        <p:spPr>
+          <a:xfrm>
+            <a:off x="5762850" y="3373549"/>
+            <a:ext cx="821123" cy="615553"/>
+          </a:xfrm>
+          <a:prstGeom prst="rect">
+            <a:avLst/>
+          </a:prstGeom>
+          <a:noFill/>
+        </p:spPr>
+        <p:txBody>
+          <a:bodyPr wrap="square" rtlCol="0">
+            <a:spAutoFit/>
+          </a:bodyPr>
+          <a:lstStyle/>
+          <a:p>
+            <a:pPr algn="ctr"/>
+            <a:r>
+              <a:rPr kumimoji="1" lang="ko-KR" altLang="en-US" sz="1200" b="1" dirty="0">
+                <a:solidFill>
+                  <a:srgbClr val="00B050"/>
+                </a:solidFill>
+                <a:latin typeface="Paperlogy 4 Regular" pitchFamily="2" charset="-127"/>
+                <a:ea typeface="Paperlogy 4 Regular" pitchFamily="2" charset="-127"/>
+              </a:rPr>
+              <a:t>산출물</a:t>
+            </a:r>
+            <a:br>
+              <a:rPr kumimoji="1" lang="en-US" altLang="ko-KR" sz="1200" dirty="0">
+                <a:solidFill>
+                  <a:srgbClr val="00B050"/>
+                </a:solidFill>
+                <a:latin typeface="Paperlogy 4 Regular" pitchFamily="2" charset="-127"/>
+                <a:ea typeface="Paperlogy 4 Regular" pitchFamily="2" charset="-127"/>
+              </a:rPr>
+            </a:br>
+            <a:r>
+              <a:rPr kumimoji="1" lang="ko-KR" altLang="en-US" sz="1100" dirty="0">
+                <a:solidFill>
+                  <a:schemeClr val="tx1">
+                    <a:lumMod val="65000"/>
+                    <a:lumOff val="35000"/>
+                  </a:schemeClr>
+                </a:solidFill>
+                <a:latin typeface="Paperlogy 4 Regular" pitchFamily="2" charset="-127"/>
+                <a:ea typeface="Paperlogy 4 Regular" pitchFamily="2" charset="-127"/>
+              </a:rPr>
+              <a:t>  </a:t>
+            </a:r>
+            <a:r>
+              <a:rPr kumimoji="1" lang="en-US" altLang="ko-KR" sz="1100" dirty="0">
+                <a:solidFill>
+                  <a:schemeClr val="tx1">
+                    <a:lumMod val="65000"/>
+                    <a:lumOff val="35000"/>
+                  </a:schemeClr>
+                </a:solidFill>
+                <a:latin typeface="Paperlogy 4 Regular" pitchFamily="2" charset="-127"/>
+                <a:ea typeface="Paperlogy 4 Regular" pitchFamily="2" charset="-127"/>
+              </a:rPr>
+              <a:t>out(</a:t>
+            </a:r>
+            <a:r>
+              <a:rPr kumimoji="1" lang="ko-KR" altLang="en-US" sz="1100" dirty="0">
+                <a:solidFill>
+                  <a:schemeClr val="tx1">
+                    <a:lumMod val="65000"/>
+                    <a:lumOff val="35000"/>
+                  </a:schemeClr>
+                </a:solidFill>
+                <a:latin typeface="Paperlogy 4 Regular" pitchFamily="2" charset="-127"/>
+                <a:ea typeface="Paperlogy 4 Regular" pitchFamily="2" charset="-127"/>
+              </a:rPr>
+              <a:t>자산</a:t>
+            </a:r>
+            <a:r>
+              <a:rPr kumimoji="1" lang="en-US" altLang="ko-KR" sz="1100" dirty="0">
+                <a:solidFill>
+                  <a:schemeClr val="tx1">
+                    <a:lumMod val="65000"/>
+                    <a:lumOff val="35000"/>
+                  </a:schemeClr>
+                </a:solidFill>
+                <a:latin typeface="Paperlogy 4 Regular" pitchFamily="2" charset="-127"/>
+                <a:ea typeface="Paperlogy 4 Regular" pitchFamily="2" charset="-127"/>
+              </a:rPr>
+              <a:t>)</a:t>
+            </a:r>
+          </a:p>
+          <a:p>
+            <a:pPr algn="ctr"/>
+            <a:r>
+              <a:rPr kumimoji="1" lang="en-US" altLang="ko-KR" sz="1100" dirty="0">
+                <a:solidFill>
+                  <a:schemeClr val="tx1">
+                    <a:lumMod val="65000"/>
+                    <a:lumOff val="35000"/>
+                  </a:schemeClr>
+                </a:solidFill>
+                <a:latin typeface="Paperlogy 4 Regular" pitchFamily="2" charset="-127"/>
+                <a:ea typeface="Paperlogy 4 Regular" pitchFamily="2" charset="-127"/>
+              </a:rPr>
+              <a:t> prompt</a:t>
+            </a:r>
+            <a:endParaRPr kumimoji="1" lang="ko-KR" altLang="en-US" sz="1100" dirty="0">
+              <a:solidFill>
+                <a:schemeClr val="tx1">
+                  <a:lumMod val="65000"/>
+                  <a:lumOff val="35000"/>
+                </a:schemeClr>
+              </a:solidFill>
+              <a:latin typeface="Paperlogy 4 Regular" pitchFamily="2" charset="-127"/>
+              <a:ea typeface="Paperlogy 4 Regular" pitchFamily="2" charset="-127"/>
+            </a:endParaRPr>
+          </a:p>
+        </p:txBody>
+      </p:sp>
+      <p:sp>
+        <p:nvSpPr>
+          <p:cNvPr id="25" name="TextBox 24">
+            <a:extLst>
+              <a:ext uri="{FF2B5EF4-FFF2-40B4-BE49-F238E27FC236}">
+                <a16:creationId xmlns:a16="http://schemas.microsoft.com/office/drawing/2014/main" id="{4491A8E4-6F84-71AE-F2E2-381DC3A88741}"/>
+              </a:ext>
+            </a:extLst>
+          </p:cNvPr>
+          <p:cNvSpPr txBox="1"/>
+          <p:nvPr/>
+        </p:nvSpPr>
+        <p:spPr>
+          <a:xfrm>
+            <a:off x="5762850" y="2302221"/>
+            <a:ext cx="821123" cy="615553"/>
+          </a:xfrm>
+          <a:prstGeom prst="rect">
+            <a:avLst/>
+          </a:prstGeom>
+          <a:noFill/>
+        </p:spPr>
+        <p:txBody>
+          <a:bodyPr wrap="square" rtlCol="0">
+            <a:spAutoFit/>
+          </a:bodyPr>
+          <a:lstStyle/>
+          <a:p>
+            <a:pPr algn="ctr"/>
+            <a:r>
+              <a:rPr kumimoji="1" lang="ko-KR" altLang="en-US" sz="1200" b="1" dirty="0">
+                <a:solidFill>
+                  <a:srgbClr val="00B050"/>
+                </a:solidFill>
+                <a:latin typeface="Paperlogy 4 Regular" pitchFamily="2" charset="-127"/>
+                <a:ea typeface="Paperlogy 4 Regular" pitchFamily="2" charset="-127"/>
+              </a:rPr>
+              <a:t>방법론</a:t>
+            </a:r>
+            <a:br>
+              <a:rPr kumimoji="1" lang="en-US" altLang="ko-KR" sz="1200" dirty="0">
+                <a:solidFill>
+                  <a:srgbClr val="00B050"/>
+                </a:solidFill>
+                <a:latin typeface="Paperlogy 4 Regular" pitchFamily="2" charset="-127"/>
+                <a:ea typeface="Paperlogy 4 Regular" pitchFamily="2" charset="-127"/>
+              </a:rPr>
+            </a:br>
+            <a:r>
+              <a:rPr kumimoji="1" lang="en-US" altLang="ko-KR" sz="1100" dirty="0" err="1">
+                <a:solidFill>
+                  <a:schemeClr val="tx1">
+                    <a:lumMod val="65000"/>
+                    <a:lumOff val="35000"/>
+                  </a:schemeClr>
+                </a:solidFill>
+                <a:latin typeface="Paperlogy 4 Regular" pitchFamily="2" charset="-127"/>
+                <a:ea typeface="Paperlogy 4 Regular" pitchFamily="2" charset="-127"/>
+              </a:rPr>
+              <a:t>streering</a:t>
+            </a:r>
+            <a:endParaRPr kumimoji="1" lang="en-US" altLang="ko-KR" sz="1100" dirty="0">
+              <a:solidFill>
+                <a:schemeClr val="tx1">
+                  <a:lumMod val="65000"/>
+                  <a:lumOff val="35000"/>
+                </a:schemeClr>
+              </a:solidFill>
+              <a:latin typeface="Paperlogy 4 Regular" pitchFamily="2" charset="-127"/>
+              <a:ea typeface="Paperlogy 4 Regular" pitchFamily="2" charset="-127"/>
+            </a:endParaRPr>
+          </a:p>
+          <a:p>
+            <a:pPr algn="ctr"/>
+            <a:r>
+              <a:rPr kumimoji="1" lang="en-US" altLang="ko-KR" sz="1100" dirty="0">
+                <a:solidFill>
+                  <a:schemeClr val="tx1">
+                    <a:lumMod val="65000"/>
+                    <a:lumOff val="35000"/>
+                  </a:schemeClr>
+                </a:solidFill>
+                <a:latin typeface="Paperlogy 4 Regular" pitchFamily="2" charset="-127"/>
+                <a:ea typeface="Paperlogy 4 Regular" pitchFamily="2" charset="-127"/>
+              </a:rPr>
+              <a:t> prompt</a:t>
+            </a:r>
+            <a:endParaRPr kumimoji="1" lang="ko-KR" altLang="en-US" sz="1100" dirty="0">
+              <a:solidFill>
+                <a:schemeClr val="tx1">
+                  <a:lumMod val="65000"/>
+                  <a:lumOff val="35000"/>
+                </a:schemeClr>
+              </a:solidFill>
+              <a:latin typeface="Paperlogy 4 Regular" pitchFamily="2" charset="-127"/>
+              <a:ea typeface="Paperlogy 4 Regular" pitchFamily="2" charset="-127"/>
+            </a:endParaRPr>
+          </a:p>
+        </p:txBody>
+      </p:sp>
+      <p:sp>
+        <p:nvSpPr>
+          <p:cNvPr id="26" name="TextBox 25">
+            <a:extLst>
+              <a:ext uri="{FF2B5EF4-FFF2-40B4-BE49-F238E27FC236}">
+                <a16:creationId xmlns:a16="http://schemas.microsoft.com/office/drawing/2014/main" id="{4EF29E22-A1BA-F80F-C3FE-41ED4CE0D8C1}"/>
+              </a:ext>
+            </a:extLst>
+          </p:cNvPr>
+          <p:cNvSpPr txBox="1"/>
+          <p:nvPr/>
+        </p:nvSpPr>
+        <p:spPr>
+          <a:xfrm>
+            <a:off x="5762850" y="1750340"/>
+            <a:ext cx="821123" cy="461665"/>
+          </a:xfrm>
+          <a:prstGeom prst="rect">
+            <a:avLst/>
+          </a:prstGeom>
+          <a:noFill/>
+        </p:spPr>
+        <p:txBody>
+          <a:bodyPr wrap="square" rtlCol="0">
+            <a:spAutoFit/>
+          </a:bodyPr>
+          <a:lstStyle/>
+          <a:p>
+            <a:pPr algn="ctr"/>
+            <a:r>
+              <a:rPr kumimoji="1" lang="ko-KR" altLang="en-US" sz="1200" b="1" dirty="0" err="1">
+                <a:solidFill>
+                  <a:srgbClr val="00B050"/>
+                </a:solidFill>
+                <a:latin typeface="Paperlogy 4 Regular" pitchFamily="2" charset="-127"/>
+                <a:ea typeface="Paperlogy 4 Regular" pitchFamily="2" charset="-127"/>
+              </a:rPr>
+              <a:t>구현물</a:t>
+            </a:r>
+            <a:br>
+              <a:rPr kumimoji="1" lang="en-US" altLang="ko-KR" sz="1200" b="1" dirty="0">
+                <a:solidFill>
+                  <a:srgbClr val="00B050"/>
+                </a:solidFill>
+                <a:latin typeface="Paperlogy 4 Regular" pitchFamily="2" charset="-127"/>
+                <a:ea typeface="Paperlogy 4 Regular" pitchFamily="2" charset="-127"/>
+              </a:rPr>
+            </a:br>
+            <a:r>
+              <a:rPr kumimoji="1" lang="ko-KR" altLang="en-US" sz="1200" b="1" dirty="0">
+                <a:solidFill>
+                  <a:srgbClr val="00B050"/>
+                </a:solidFill>
+                <a:latin typeface="Paperlogy 4 Regular" pitchFamily="2" charset="-127"/>
+                <a:ea typeface="Paperlogy 4 Regular" pitchFamily="2" charset="-127"/>
+              </a:rPr>
+              <a:t> </a:t>
+            </a:r>
+            <a:r>
+              <a:rPr kumimoji="1" lang="en-US" altLang="ko-KR" sz="1200" dirty="0">
+                <a:solidFill>
+                  <a:schemeClr val="tx1">
+                    <a:lumMod val="65000"/>
+                    <a:lumOff val="35000"/>
+                  </a:schemeClr>
+                </a:solidFill>
+                <a:latin typeface="Paperlogy 4 Regular" pitchFamily="2" charset="-127"/>
+                <a:ea typeface="Paperlogy 4 Regular" pitchFamily="2" charset="-127"/>
+              </a:rPr>
+              <a:t>apps</a:t>
+            </a:r>
+            <a:endParaRPr kumimoji="1" lang="ko-KR" altLang="en-US" sz="1100" dirty="0">
+              <a:solidFill>
+                <a:srgbClr val="00B050"/>
+              </a:solidFill>
+              <a:latin typeface="Paperlogy 4 Regular" pitchFamily="2" charset="-127"/>
+              <a:ea typeface="Paperlogy 4 Regular" pitchFamily="2" charset="-127"/>
+            </a:endParaRPr>
+          </a:p>
+        </p:txBody>
+      </p:sp>
+      <p:sp>
+        <p:nvSpPr>
+          <p:cNvPr id="27" name="TextBox 26">
+            <a:extLst>
+              <a:ext uri="{FF2B5EF4-FFF2-40B4-BE49-F238E27FC236}">
+                <a16:creationId xmlns:a16="http://schemas.microsoft.com/office/drawing/2014/main" id="{3988F958-5A30-61CC-88BA-3CAAAAF1F5F3}"/>
+              </a:ext>
+            </a:extLst>
+          </p:cNvPr>
+          <p:cNvSpPr txBox="1"/>
+          <p:nvPr/>
+        </p:nvSpPr>
+        <p:spPr>
+          <a:xfrm>
+            <a:off x="6255950" y="5592391"/>
+            <a:ext cx="5430654" cy="338554"/>
+          </a:xfrm>
+          <a:prstGeom prst="rect">
+            <a:avLst/>
+          </a:prstGeom>
+          <a:noFill/>
+        </p:spPr>
+        <p:txBody>
+          <a:bodyPr wrap="none" rtlCol="0">
+            <a:spAutoFit/>
+          </a:bodyPr>
+          <a:lstStyle/>
+          <a:p>
+            <a:r>
+              <a:rPr kumimoji="1" lang="en-US" altLang="ko-KR" sz="1600" spc="130" dirty="0">
+                <a:solidFill>
+                  <a:srgbClr val="0070C0"/>
+                </a:solidFill>
+                <a:latin typeface="Paperlogy 4 Regular" pitchFamily="2" charset="-127"/>
+                <a:ea typeface="Paperlogy 4 Regular" pitchFamily="2" charset="-127"/>
+              </a:rPr>
+              <a:t>‘</a:t>
+            </a:r>
+            <a:r>
+              <a:rPr kumimoji="1" lang="ko-KR" altLang="en-US" sz="1600" spc="130" dirty="0">
+                <a:solidFill>
+                  <a:srgbClr val="0070C0"/>
+                </a:solidFill>
+                <a:latin typeface="Paperlogy 4 Regular" pitchFamily="2" charset="-127"/>
+                <a:ea typeface="Paperlogy 4 Regular" pitchFamily="2" charset="-127"/>
+              </a:rPr>
+              <a:t>방법론</a:t>
+            </a:r>
+            <a:r>
+              <a:rPr kumimoji="1" lang="en-US" altLang="ko-KR" sz="1600" spc="130" dirty="0">
+                <a:solidFill>
+                  <a:srgbClr val="0070C0"/>
+                </a:solidFill>
+                <a:latin typeface="Paperlogy 4 Regular" pitchFamily="2" charset="-127"/>
+                <a:ea typeface="Paperlogy 4 Regular" pitchFamily="2" charset="-127"/>
+              </a:rPr>
+              <a:t>’</a:t>
+            </a:r>
+            <a:r>
+              <a:rPr kumimoji="1" lang="ko-KR" altLang="en-US" sz="1600" spc="130" dirty="0">
+                <a:solidFill>
+                  <a:srgbClr val="0070C0"/>
+                </a:solidFill>
+                <a:latin typeface="Paperlogy 4 Regular" pitchFamily="2" charset="-127"/>
+                <a:ea typeface="Paperlogy 4 Regular" pitchFamily="2" charset="-127"/>
+              </a:rPr>
+              <a:t>을 기준으로 </a:t>
+            </a:r>
+            <a:r>
+              <a:rPr kumimoji="1" lang="en-US" altLang="ko-KR" sz="1600" spc="130" dirty="0">
+                <a:solidFill>
+                  <a:srgbClr val="0070C0"/>
+                </a:solidFill>
+                <a:latin typeface="Paperlogy 4 Regular" pitchFamily="2" charset="-127"/>
+                <a:ea typeface="Paperlogy 4 Regular" pitchFamily="2" charset="-127"/>
+              </a:rPr>
+              <a:t>‘</a:t>
+            </a:r>
+            <a:r>
+              <a:rPr kumimoji="1" lang="ko-KR" altLang="en-US" sz="1600" spc="130" dirty="0">
+                <a:solidFill>
+                  <a:srgbClr val="0070C0"/>
+                </a:solidFill>
+                <a:latin typeface="Paperlogy 4 Regular" pitchFamily="2" charset="-127"/>
+                <a:ea typeface="Paperlogy 4 Regular" pitchFamily="2" charset="-127"/>
+              </a:rPr>
+              <a:t>자료</a:t>
+            </a:r>
+            <a:r>
+              <a:rPr kumimoji="1" lang="en-US" altLang="ko-KR" sz="1600" spc="130" dirty="0">
+                <a:solidFill>
+                  <a:srgbClr val="0070C0"/>
+                </a:solidFill>
+                <a:latin typeface="Paperlogy 4 Regular" pitchFamily="2" charset="-127"/>
+                <a:ea typeface="Paperlogy 4 Regular" pitchFamily="2" charset="-127"/>
+              </a:rPr>
+              <a:t>’</a:t>
+            </a:r>
+            <a:r>
+              <a:rPr kumimoji="1" lang="ko-KR" altLang="en-US" sz="1600" spc="130" dirty="0" err="1">
+                <a:solidFill>
+                  <a:srgbClr val="0070C0"/>
+                </a:solidFill>
+                <a:latin typeface="Paperlogy 4 Regular" pitchFamily="2" charset="-127"/>
+                <a:ea typeface="Paperlogy 4 Regular" pitchFamily="2" charset="-127"/>
+              </a:rPr>
+              <a:t>를</a:t>
+            </a:r>
+            <a:r>
+              <a:rPr kumimoji="1" lang="ko-KR" altLang="en-US" sz="1600" spc="130" dirty="0">
+                <a:solidFill>
+                  <a:srgbClr val="0070C0"/>
+                </a:solidFill>
+                <a:latin typeface="Paperlogy 4 Regular" pitchFamily="2" charset="-127"/>
+                <a:ea typeface="Paperlogy 4 Regular" pitchFamily="2" charset="-127"/>
+              </a:rPr>
+              <a:t> 참조해서 </a:t>
+            </a:r>
+            <a:r>
+              <a:rPr kumimoji="1" lang="en-US" altLang="ko-KR" sz="1600" spc="130" dirty="0">
+                <a:solidFill>
+                  <a:srgbClr val="0070C0"/>
+                </a:solidFill>
+                <a:latin typeface="Paperlogy 4 Regular" pitchFamily="2" charset="-127"/>
+                <a:ea typeface="Paperlogy 4 Regular" pitchFamily="2" charset="-127"/>
+              </a:rPr>
+              <a:t>‘</a:t>
+            </a:r>
+            <a:r>
+              <a:rPr kumimoji="1" lang="ko-KR" altLang="en-US" sz="1600" spc="130" dirty="0">
+                <a:solidFill>
+                  <a:srgbClr val="0070C0"/>
+                </a:solidFill>
+                <a:latin typeface="Paperlogy 4 Regular" pitchFamily="2" charset="-127"/>
+                <a:ea typeface="Paperlogy 4 Regular" pitchFamily="2" charset="-127"/>
+              </a:rPr>
+              <a:t>산출물</a:t>
+            </a:r>
+            <a:r>
+              <a:rPr kumimoji="1" lang="en-US" altLang="ko-KR" sz="1600" spc="130" dirty="0">
+                <a:solidFill>
+                  <a:srgbClr val="0070C0"/>
+                </a:solidFill>
+                <a:latin typeface="Paperlogy 4 Regular" pitchFamily="2" charset="-127"/>
+                <a:ea typeface="Paperlogy 4 Regular" pitchFamily="2" charset="-127"/>
+              </a:rPr>
+              <a:t>’</a:t>
+            </a:r>
+            <a:r>
+              <a:rPr kumimoji="1" lang="ko-KR" altLang="en-US" sz="1600" spc="130" dirty="0">
+                <a:solidFill>
+                  <a:srgbClr val="0070C0"/>
+                </a:solidFill>
+                <a:latin typeface="Paperlogy 4 Regular" pitchFamily="2" charset="-127"/>
+                <a:ea typeface="Paperlogy 4 Regular" pitchFamily="2" charset="-127"/>
+              </a:rPr>
+              <a:t>을 생성해줘</a:t>
+            </a:r>
+          </a:p>
+        </p:txBody>
+      </p:sp>
+    </p:spTree>
+    <p:extLst>
+      <p:ext uri="{BB962C8B-B14F-4D97-AF65-F5344CB8AC3E}">
+        <p14:creationId xmlns:p14="http://schemas.microsoft.com/office/powerpoint/2010/main" val="4109377342"/>
+      </p:ext>
+    </p:extLst>
   </p:cSld>
   <p:clrMapOvr>
     <a:masterClrMapping/>
